--- a/samples/animations/all-effects.pptx
+++ b/samples/animations/all-effects.pptx
@@ -5772,7 +5772,7 @@
                 <a:ea typeface="Arial" pitchFamily="34" charset="-122"/>
                 <a:cs typeface="Arial" pitchFamily="34" charset="-120"/>
               </a:rPr>
-              <a:t>presetID=2  ·  presetClass=entr    </a:t>
+              <a:t>presetID=2  ·  presetClass=entr    （网页侧为近似）</a:t>
             </a:r>
             <a:endParaRPr lang="en-US" sz="1400" dirty="0"/>
           </a:p>
@@ -10646,7 +10646,21 @@
                                   <p:childTnLst>
                                     <p:animScale>
                                       <p:cBhvr>
-                                        <p:cTn id="6" dur="450" accel="20000" decel="60000" fill="hold"/>
+                                        <p:cTn id="6" dur="270" accel="20000" decel="60000" fill="hold"/>
+                                        <p:tgtEl>
+                                          <p:spTgt spid="4"/>
+                                        </p:tgtEl>
+                                      </p:cBhvr>
+                                      <p:from x="100000" y="100000"/>
+                                      <p:to x="95000" y="95000"/>
+                                    </p:animScale>
+                                    <p:animScale>
+                                      <p:cBhvr>
+                                        <p:cTn id="7" dur="360" accel="20000" decel="60000" fill="hold">
+                                          <p:stCondLst>
+                                            <p:cond delay="270"/>
+                                          </p:stCondLst>
+                                        </p:cTn>
                                         <p:tgtEl>
                                           <p:spTgt spid="4"/>
                                         </p:tgtEl>
@@ -10656,9 +10670,9 @@
                                     </p:animScale>
                                     <p:animScale>
                                       <p:cBhvr>
-                                        <p:cTn id="7" dur="450" accel="20000" decel="60000" fill="remove">
+                                        <p:cTn id="8" dur="270" accel="20000" decel="60000" fill="remove">
                                           <p:stCondLst>
-                                            <p:cond delay="450"/>
+                                            <p:cond delay="630"/>
                                           </p:stCondLst>
                                         </p:cTn>
                                         <p:tgtEl>
@@ -10860,7 +10874,21 @@
                                   <p:childTnLst>
                                     <p:animScale>
                                       <p:cBhvr>
-                                        <p:cTn id="6" dur="450" accel="20000" decel="60000" fill="hold"/>
+                                        <p:cTn id="6" dur="270" accel="20000" decel="60000" fill="hold"/>
+                                        <p:tgtEl>
+                                          <p:spTgt spid="4"/>
+                                        </p:tgtEl>
+                                      </p:cBhvr>
+                                      <p:from x="100000" y="100000"/>
+                                      <p:to x="90000" y="90000"/>
+                                    </p:animScale>
+                                    <p:animScale>
+                                      <p:cBhvr>
+                                        <p:cTn id="7" dur="360" accel="20000" decel="60000" fill="hold">
+                                          <p:stCondLst>
+                                            <p:cond delay="270"/>
+                                          </p:stCondLst>
+                                        </p:cTn>
                                         <p:tgtEl>
                                           <p:spTgt spid="4"/>
                                         </p:tgtEl>
@@ -10870,9 +10898,9 @@
                                     </p:animScale>
                                     <p:animScale>
                                       <p:cBhvr>
-                                        <p:cTn id="7" dur="450" accel="20000" decel="60000" fill="remove">
+                                        <p:cTn id="8" dur="270" accel="20000" decel="60000" fill="remove">
                                           <p:stCondLst>
-                                            <p:cond delay="450"/>
+                                            <p:cond delay="630"/>
                                           </p:stCondLst>
                                         </p:cTn>
                                         <p:tgtEl>
@@ -11074,7 +11102,21 @@
                                   <p:childTnLst>
                                     <p:animScale>
                                       <p:cBhvr>
-                                        <p:cTn id="6" dur="450" accel="20000" decel="60000" fill="hold"/>
+                                        <p:cTn id="6" dur="270" accel="20000" decel="60000" fill="hold"/>
+                                        <p:tgtEl>
+                                          <p:spTgt spid="4"/>
+                                        </p:tgtEl>
+                                      </p:cBhvr>
+                                      <p:from x="100000" y="100000"/>
+                                      <p:to x="85000" y="85000"/>
+                                    </p:animScale>
+                                    <p:animScale>
+                                      <p:cBhvr>
+                                        <p:cTn id="7" dur="360" accel="20000" decel="60000" fill="hold">
+                                          <p:stCondLst>
+                                            <p:cond delay="270"/>
+                                          </p:stCondLst>
+                                        </p:cTn>
                                         <p:tgtEl>
                                           <p:spTgt spid="4"/>
                                         </p:tgtEl>
@@ -11084,9 +11126,9 @@
                                     </p:animScale>
                                     <p:animScale>
                                       <p:cBhvr>
-                                        <p:cTn id="7" dur="450" accel="20000" decel="60000" fill="remove">
+                                        <p:cTn id="8" dur="270" accel="20000" decel="60000" fill="remove">
                                           <p:stCondLst>
-                                            <p:cond delay="450"/>
+                                            <p:cond delay="630"/>
                                           </p:stCondLst>
                                         </p:cTn>
                                         <p:tgtEl>
@@ -12771,7 +12813,7 @@
                 <a:ea typeface="Arial" pitchFamily="34" charset="-122"/>
                 <a:cs typeface="Arial" pitchFamily="34" charset="-120"/>
               </a:rPr>
-              <a:t>presetID=2  ·  presetClass=exit    </a:t>
+              <a:t>presetID=2  ·  presetClass=exit    （网页侧为近似）</a:t>
             </a:r>
             <a:endParaRPr lang="en-US" sz="1400" dirty="0"/>
           </a:p>
